--- a/templates/posts/october/09-10-2026-fri-ig-mentors-gerald-caterina.pptx
+++ b/templates/posts/october/09-10-2026-fri-ig-mentors-gerald-caterina.pptx
@@ -503,7 +503,7 @@
           <a:lstStyle/>
           <a:p>
             <a:r>
-              <a:t>Photo: assets/mentors-teachers-day/gerald-teaching.jpg (Gerald teaching a workshop). Confirm it is the Costa Rica workshop, March 2025, demonstrating liquid amendments [VERIFY]. Earlier posts spell his name Ramírez [VERIFY].</a:t>
+              <a:t>Photo: assets/mentors-teachers-day/gerald-teaching.jpg (Gerald teaching a workshop). Confirm it is the Costa Rica workshop, March 2025, demonstrating liquid amendments [VERIFY]. Earlier posts spell his name Ramírez [VERIFY]. Stickers are drawn shapes.</a:t>
             </a:r>
           </a:p>
         </p:txBody>
@@ -573,7 +573,7 @@
           <a:lstStyle/>
           <a:p>
             <a:r>
-              <a:t>[PHOTO NEEDED: Caterina headshot from Allison]</a:t>
+              <a:t>[PHOTO NEEDED: Caterina headshot from Allison] Stickers are drawn shapes.</a:t>
             </a:r>
           </a:p>
         </p:txBody>
@@ -3575,7 +3575,7 @@
     <p:bg>
       <p:bgPr>
         <a:solidFill>
-          <a:srgbClr val="22371F"/>
+          <a:srgbClr val="F4F1EA"/>
         </a:solidFill>
         <a:effectLst/>
       </p:bgPr>
@@ -3589,7 +3589,7 @@
       <p:grpSpPr/>
       <p:pic>
         <p:nvPicPr>
-          <p:cNvPr id="2" name="Picture 1" descr="1355419524538447674.jpg"/>
+          <p:cNvPr id="2" name="Picture 1" descr="paper-grain-cream.jpg"/>
           <p:cNvPicPr>
             <a:picLocks noChangeAspect="1"/>
           </p:cNvPicPr>
@@ -3604,7 +3604,7 @@
         <p:spPr>
           <a:xfrm>
             <a:off x="0" y="0"/>
-            <a:ext cx="10287000" cy="8362950"/>
+            <a:ext cx="10287000" cy="12858750"/>
           </a:xfrm>
           <a:prstGeom prst="rect">
             <a:avLst/>
@@ -3614,6 +3614,172 @@
       <p:sp>
         <p:nvSpPr>
           <p:cNvPr id="3" name="Rectangle 2"/>
+          <p:cNvSpPr/>
+          <p:nvPr/>
+        </p:nvSpPr>
+        <p:spPr>
+          <a:xfrm rot="21480000">
+            <a:off x="476250" y="381000"/>
+            <a:ext cx="9334500" cy="7810500"/>
+          </a:xfrm>
+          <a:prstGeom prst="rect">
+            <a:avLst/>
+          </a:prstGeom>
+          <a:solidFill>
+            <a:srgbClr val="FFFDF7"/>
+          </a:solidFill>
+          <a:ln>
+            <a:noFill/>
+          </a:ln>
+          <a:effectLst>
+            <a:outerShdw blurRad="228600" dist="76200" dir="5400000" algn="t" rotWithShape="0">
+              <a:srgbClr val="000000">
+                <a:alpha val="30000"/>
+              </a:srgbClr>
+            </a:outerShdw>
+          </a:effectLst>
+        </p:spPr>
+        <p:style>
+          <a:lnRef idx="1">
+            <a:schemeClr val="accent1"/>
+          </a:lnRef>
+          <a:fillRef idx="3">
+            <a:schemeClr val="accent1"/>
+          </a:fillRef>
+          <a:effectRef idx="2">
+            <a:schemeClr val="accent1"/>
+          </a:effectRef>
+          <a:fontRef idx="minor">
+            <a:schemeClr val="lt1"/>
+          </a:fontRef>
+        </p:style>
+        <p:txBody>
+          <a:bodyPr rtlCol="0" anchor="ctr"/>
+          <a:lstStyle/>
+          <a:p>
+            <a:pPr algn="ctr"/>
+          </a:p>
+        </p:txBody>
+      </p:sp>
+      <p:pic>
+        <p:nvPicPr>
+          <p:cNvPr id="4" name="Picture 3" descr="5382161659184697036.jpg"/>
+          <p:cNvPicPr>
+            <a:picLocks noChangeAspect="1"/>
+          </p:cNvPicPr>
+          <p:nvPr/>
+        </p:nvPicPr>
+        <p:blipFill>
+          <a:blip r:embed="rId4"/>
+          <a:stretch>
+            <a:fillRect/>
+          </a:stretch>
+        </p:blipFill>
+        <p:spPr>
+          <a:xfrm rot="21480000">
+            <a:off x="666750" y="571500"/>
+            <a:ext cx="8953500" cy="7429500"/>
+          </a:xfrm>
+          <a:prstGeom prst="rect">
+            <a:avLst/>
+          </a:prstGeom>
+        </p:spPr>
+      </p:pic>
+      <p:sp>
+        <p:nvSpPr>
+          <p:cNvPr id="5" name="Rectangle 4"/>
+          <p:cNvSpPr/>
+          <p:nvPr/>
+        </p:nvSpPr>
+        <p:spPr>
+          <a:xfrm rot="19800000">
+            <a:off x="285750" y="323850"/>
+            <a:ext cx="1714500" cy="495300"/>
+          </a:xfrm>
+          <a:prstGeom prst="rect">
+            <a:avLst/>
+          </a:prstGeom>
+          <a:solidFill>
+            <a:srgbClr val="DBE6A7">
+              <a:alpha val="70000"/>
+            </a:srgbClr>
+          </a:solidFill>
+          <a:ln>
+            <a:noFill/>
+          </a:ln>
+          <a:effectLst/>
+        </p:spPr>
+        <p:style>
+          <a:lnRef idx="1">
+            <a:schemeClr val="accent1"/>
+          </a:lnRef>
+          <a:fillRef idx="3">
+            <a:schemeClr val="accent1"/>
+          </a:fillRef>
+          <a:effectRef idx="2">
+            <a:schemeClr val="accent1"/>
+          </a:effectRef>
+          <a:fontRef idx="minor">
+            <a:schemeClr val="lt1"/>
+          </a:fontRef>
+        </p:style>
+        <p:txBody>
+          <a:bodyPr rtlCol="0" anchor="ctr"/>
+          <a:lstStyle/>
+          <a:p>
+            <a:pPr algn="ctr"/>
+          </a:p>
+        </p:txBody>
+      </p:sp>
+      <p:sp>
+        <p:nvSpPr>
+          <p:cNvPr id="6" name="Rectangle 5"/>
+          <p:cNvSpPr/>
+          <p:nvPr/>
+        </p:nvSpPr>
+        <p:spPr>
+          <a:xfrm rot="1800000">
+            <a:off x="8286750" y="323850"/>
+            <a:ext cx="1714500" cy="495300"/>
+          </a:xfrm>
+          <a:prstGeom prst="rect">
+            <a:avLst/>
+          </a:prstGeom>
+          <a:solidFill>
+            <a:srgbClr val="DBE6A7">
+              <a:alpha val="70000"/>
+            </a:srgbClr>
+          </a:solidFill>
+          <a:ln>
+            <a:noFill/>
+          </a:ln>
+          <a:effectLst/>
+        </p:spPr>
+        <p:style>
+          <a:lnRef idx="1">
+            <a:schemeClr val="accent1"/>
+          </a:lnRef>
+          <a:fillRef idx="3">
+            <a:schemeClr val="accent1"/>
+          </a:fillRef>
+          <a:effectRef idx="2">
+            <a:schemeClr val="accent1"/>
+          </a:effectRef>
+          <a:fontRef idx="minor">
+            <a:schemeClr val="lt1"/>
+          </a:fontRef>
+        </p:style>
+        <p:txBody>
+          <a:bodyPr rtlCol="0" anchor="ctr"/>
+          <a:lstStyle/>
+          <a:p>
+            <a:pPr algn="ctr"/>
+          </a:p>
+        </p:txBody>
+      </p:sp>
+      <p:sp>
+        <p:nvSpPr>
+          <p:cNvPr id="7" name="Rectangle 6"/>
           <p:cNvSpPr/>
           <p:nvPr/>
         </p:nvSpPr>
@@ -3657,21 +3823,21 @@
       </p:sp>
       <p:pic>
         <p:nvPicPr>
-          <p:cNvPr id="4" name="Picture 3" descr="trim-dried-flowers-2-1.png"/>
+          <p:cNvPr id="8" name="Picture 7" descr="trim-dried-flowers-2-1.png"/>
           <p:cNvPicPr>
             <a:picLocks noChangeAspect="1"/>
           </p:cNvPicPr>
           <p:nvPr/>
         </p:nvPicPr>
         <p:blipFill>
-          <a:blip r:embed="rId4"/>
+          <a:blip r:embed="rId5"/>
           <a:stretch>
             <a:fillRect/>
           </a:stretch>
         </p:blipFill>
         <p:spPr>
           <a:xfrm rot="1680000">
-            <a:off x="8477250" y="6161822"/>
+            <a:off x="8477250" y="6352322"/>
             <a:ext cx="1809750" cy="2725855"/>
           </a:xfrm>
           <a:prstGeom prst="rect">
@@ -3679,9 +3845,526 @@
           </a:prstGeom>
         </p:spPr>
       </p:pic>
-      <p:sp>
-        <p:nvSpPr>
-          <p:cNvPr id="5" name="Rounded Rectangle 4"/>
+      <p:grpSp>
+        <p:nvGrpSpPr>
+          <p:cNvPr id="9" name="Group 8"/>
+          <p:cNvGrpSpPr/>
+          <p:nvPr/>
+        </p:nvGrpSpPr>
+        <p:grpSpPr>
+          <a:xfrm rot="360000">
+            <a:off x="0" y="0"/>
+            <a:ext cx="9479280" cy="11161395"/>
+            <a:chOff x="0" y="0"/>
+            <a:chExt cx="9479280" cy="11161395"/>
+          </a:xfrm>
+        </p:grpSpPr>
+        <p:sp>
+          <p:nvSpPr>
+            <p:cNvPr id="10" name="Oval 9"/>
+            <p:cNvSpPr/>
+            <p:nvPr/>
+          </p:nvSpPr>
+          <p:spPr>
+            <a:xfrm>
+              <a:off x="7681912" y="10740390"/>
+              <a:ext cx="1781175" cy="421005"/>
+            </a:xfrm>
+            <a:prstGeom prst="ellipse">
+              <a:avLst/>
+            </a:prstGeom>
+            <a:solidFill>
+              <a:srgbClr val="FFFDF7"/>
+            </a:solidFill>
+            <a:ln w="57150">
+              <a:solidFill>
+                <a:srgbClr val="FFFFFF"/>
+              </a:solidFill>
+            </a:ln>
+            <a:effectLst>
+              <a:outerShdw blurRad="228600" dist="76200" dir="5400000" algn="t" rotWithShape="0">
+                <a:srgbClr val="000000">
+                  <a:alpha val="30000"/>
+                </a:srgbClr>
+              </a:outerShdw>
+            </a:effectLst>
+          </p:spPr>
+          <p:style>
+            <a:lnRef idx="1">
+              <a:schemeClr val="accent1"/>
+            </a:lnRef>
+            <a:fillRef idx="3">
+              <a:schemeClr val="accent1"/>
+            </a:fillRef>
+            <a:effectRef idx="2">
+              <a:schemeClr val="accent1"/>
+            </a:effectRef>
+            <a:fontRef idx="minor">
+              <a:schemeClr val="lt1"/>
+            </a:fontRef>
+          </p:style>
+          <p:txBody>
+            <a:bodyPr rtlCol="0" anchor="ctr"/>
+            <a:lstStyle/>
+            <a:p>
+              <a:pPr algn="ctr"/>
+            </a:p>
+          </p:txBody>
+        </p:sp>
+        <p:sp>
+          <p:nvSpPr>
+            <p:cNvPr id="11" name="Donut 10"/>
+            <p:cNvSpPr/>
+            <p:nvPr/>
+          </p:nvSpPr>
+          <p:spPr>
+            <a:xfrm>
+              <a:off x="8993505" y="10092690"/>
+              <a:ext cx="485775" cy="485775"/>
+            </a:xfrm>
+            <a:prstGeom prst="donut">
+              <a:avLst/>
+            </a:prstGeom>
+            <a:solidFill>
+              <a:srgbClr val="FFFDF7"/>
+            </a:solidFill>
+            <a:ln w="57150">
+              <a:solidFill>
+                <a:srgbClr val="FFFFFF"/>
+              </a:solidFill>
+            </a:ln>
+            <a:effectLst/>
+          </p:spPr>
+          <p:style>
+            <a:lnRef idx="1">
+              <a:schemeClr val="accent1"/>
+            </a:lnRef>
+            <a:fillRef idx="3">
+              <a:schemeClr val="accent1"/>
+            </a:fillRef>
+            <a:effectRef idx="2">
+              <a:schemeClr val="accent1"/>
+            </a:effectRef>
+            <a:fontRef idx="minor">
+              <a:schemeClr val="lt1"/>
+            </a:fontRef>
+          </p:style>
+          <p:txBody>
+            <a:bodyPr rtlCol="0" anchor="ctr"/>
+            <a:lstStyle/>
+            <a:p>
+              <a:pPr algn="ctr"/>
+            </a:p>
+          </p:txBody>
+        </p:sp>
+        <p:sp>
+          <p:nvSpPr>
+            <p:cNvPr id="12" name="Rounded Rectangle 11"/>
+            <p:cNvSpPr/>
+            <p:nvPr/>
+          </p:nvSpPr>
+          <p:spPr>
+            <a:xfrm>
+              <a:off x="7957185" y="9882187"/>
+              <a:ext cx="1230630" cy="1003935"/>
+            </a:xfrm>
+            <a:prstGeom prst="roundRect">
+              <a:avLst/>
+            </a:prstGeom>
+            <a:solidFill>
+              <a:srgbClr val="FFFDF7"/>
+            </a:solidFill>
+            <a:ln w="57150">
+              <a:solidFill>
+                <a:srgbClr val="FFFFFF"/>
+              </a:solidFill>
+            </a:ln>
+            <a:effectLst/>
+          </p:spPr>
+          <p:style>
+            <a:lnRef idx="1">
+              <a:schemeClr val="accent1"/>
+            </a:lnRef>
+            <a:fillRef idx="3">
+              <a:schemeClr val="accent1"/>
+            </a:fillRef>
+            <a:effectRef idx="2">
+              <a:schemeClr val="accent1"/>
+            </a:effectRef>
+            <a:fontRef idx="minor">
+              <a:schemeClr val="lt1"/>
+            </a:fontRef>
+          </p:style>
+          <p:txBody>
+            <a:bodyPr rtlCol="0" anchor="ctr"/>
+            <a:lstStyle/>
+            <a:p>
+              <a:pPr algn="ctr"/>
+            </a:p>
+          </p:txBody>
+        </p:sp>
+        <p:sp>
+          <p:nvSpPr>
+            <p:cNvPr id="13" name="Rectangle 12"/>
+            <p:cNvSpPr/>
+            <p:nvPr/>
+          </p:nvSpPr>
+          <p:spPr>
+            <a:xfrm>
+              <a:off x="7985760" y="10481310"/>
+              <a:ext cx="1173480" cy="129540"/>
+            </a:xfrm>
+            <a:prstGeom prst="rect">
+              <a:avLst/>
+            </a:prstGeom>
+            <a:solidFill>
+              <a:srgbClr val="156826"/>
+            </a:solidFill>
+            <a:ln>
+              <a:noFill/>
+            </a:ln>
+            <a:effectLst/>
+          </p:spPr>
+          <p:style>
+            <a:lnRef idx="1">
+              <a:schemeClr val="accent1"/>
+            </a:lnRef>
+            <a:fillRef idx="3">
+              <a:schemeClr val="accent1"/>
+            </a:fillRef>
+            <a:effectRef idx="2">
+              <a:schemeClr val="accent1"/>
+            </a:effectRef>
+            <a:fontRef idx="minor">
+              <a:schemeClr val="lt1"/>
+            </a:fontRef>
+          </p:style>
+          <p:txBody>
+            <a:bodyPr rtlCol="0" anchor="ctr"/>
+            <a:lstStyle/>
+            <a:p>
+              <a:pPr algn="ctr"/>
+            </a:p>
+          </p:txBody>
+        </p:sp>
+        <p:sp>
+          <p:nvSpPr>
+            <p:cNvPr id="14" name="Oval 13"/>
+            <p:cNvSpPr/>
+            <p:nvPr/>
+          </p:nvSpPr>
+          <p:spPr>
+            <a:xfrm>
+              <a:off x="7989570" y="9768840"/>
+              <a:ext cx="1165860" cy="259080"/>
+            </a:xfrm>
+            <a:prstGeom prst="ellipse">
+              <a:avLst/>
+            </a:prstGeom>
+            <a:solidFill>
+              <a:srgbClr val="4F3433"/>
+            </a:solidFill>
+            <a:ln w="57150">
+              <a:solidFill>
+                <a:srgbClr val="FFFFFF"/>
+              </a:solidFill>
+            </a:ln>
+            <a:effectLst/>
+          </p:spPr>
+          <p:style>
+            <a:lnRef idx="1">
+              <a:schemeClr val="accent1"/>
+            </a:lnRef>
+            <a:fillRef idx="3">
+              <a:schemeClr val="accent1"/>
+            </a:fillRef>
+            <a:effectRef idx="2">
+              <a:schemeClr val="accent1"/>
+            </a:effectRef>
+            <a:fontRef idx="minor">
+              <a:schemeClr val="lt1"/>
+            </a:fontRef>
+          </p:style>
+          <p:txBody>
+            <a:bodyPr rtlCol="0" anchor="ctr"/>
+            <a:lstStyle/>
+            <a:p>
+              <a:pPr algn="ctr"/>
+            </a:p>
+          </p:txBody>
+        </p:sp>
+        <p:sp>
+          <p:nvSpPr>
+            <p:cNvPr id="15" name="Oval 14"/>
+            <p:cNvSpPr/>
+            <p:nvPr/>
+          </p:nvSpPr>
+          <p:spPr>
+            <a:xfrm>
+              <a:off x="8397081" y="10223129"/>
+              <a:ext cx="62970" cy="62970"/>
+            </a:xfrm>
+            <a:prstGeom prst="ellipse">
+              <a:avLst/>
+            </a:prstGeom>
+            <a:solidFill>
+              <a:srgbClr val="4F3433"/>
+            </a:solidFill>
+            <a:ln>
+              <a:noFill/>
+            </a:ln>
+            <a:effectLst/>
+          </p:spPr>
+          <p:style>
+            <a:lnRef idx="1">
+              <a:schemeClr val="accent1"/>
+            </a:lnRef>
+            <a:fillRef idx="3">
+              <a:schemeClr val="accent1"/>
+            </a:fillRef>
+            <a:effectRef idx="2">
+              <a:schemeClr val="accent1"/>
+            </a:effectRef>
+            <a:fontRef idx="minor">
+              <a:schemeClr val="lt1"/>
+            </a:fontRef>
+          </p:style>
+          <p:txBody>
+            <a:bodyPr rtlCol="0" anchor="ctr"/>
+            <a:lstStyle/>
+            <a:p>
+              <a:pPr algn="ctr"/>
+            </a:p>
+          </p:txBody>
+        </p:sp>
+        <p:sp>
+          <p:nvSpPr>
+            <p:cNvPr id="16" name="Oval 15"/>
+            <p:cNvSpPr/>
+            <p:nvPr/>
+          </p:nvSpPr>
+          <p:spPr>
+            <a:xfrm>
+              <a:off x="8684947" y="10223129"/>
+              <a:ext cx="62970" cy="62970"/>
+            </a:xfrm>
+            <a:prstGeom prst="ellipse">
+              <a:avLst/>
+            </a:prstGeom>
+            <a:solidFill>
+              <a:srgbClr val="4F3433"/>
+            </a:solidFill>
+            <a:ln>
+              <a:noFill/>
+            </a:ln>
+            <a:effectLst/>
+          </p:spPr>
+          <p:style>
+            <a:lnRef idx="1">
+              <a:schemeClr val="accent1"/>
+            </a:lnRef>
+            <a:fillRef idx="3">
+              <a:schemeClr val="accent1"/>
+            </a:fillRef>
+            <a:effectRef idx="2">
+              <a:schemeClr val="accent1"/>
+            </a:effectRef>
+            <a:fontRef idx="minor">
+              <a:schemeClr val="lt1"/>
+            </a:fontRef>
+          </p:style>
+          <p:txBody>
+            <a:bodyPr rtlCol="0" anchor="ctr"/>
+            <a:lstStyle/>
+            <a:p>
+              <a:pPr algn="ctr"/>
+            </a:p>
+          </p:txBody>
+        </p:sp>
+        <p:sp>
+          <p:nvSpPr>
+            <p:cNvPr id="17" name="Block Arc 16"/>
+            <p:cNvSpPr/>
+            <p:nvPr/>
+          </p:nvSpPr>
+          <p:spPr>
+            <a:xfrm rot="10800000">
+              <a:off x="8473545" y="10272606"/>
+              <a:ext cx="197908" cy="143933"/>
+            </a:xfrm>
+            <a:prstGeom prst="blockArc">
+              <a:avLst>
+                <a:gd name="adj1" fmla="val 10800000"/>
+                <a:gd name="adj2" fmla="val 0"/>
+                <a:gd name="adj3" fmla="val 18000"/>
+              </a:avLst>
+            </a:prstGeom>
+            <a:solidFill>
+              <a:srgbClr val="4F3433"/>
+            </a:solidFill>
+            <a:ln>
+              <a:noFill/>
+            </a:ln>
+            <a:effectLst/>
+          </p:spPr>
+          <p:style>
+            <a:lnRef idx="1">
+              <a:schemeClr val="accent1"/>
+            </a:lnRef>
+            <a:fillRef idx="3">
+              <a:schemeClr val="accent1"/>
+            </a:fillRef>
+            <a:effectRef idx="2">
+              <a:schemeClr val="accent1"/>
+            </a:effectRef>
+            <a:fontRef idx="minor">
+              <a:schemeClr val="lt1"/>
+            </a:fontRef>
+          </p:style>
+          <p:txBody>
+            <a:bodyPr rtlCol="0" anchor="ctr"/>
+            <a:lstStyle/>
+            <a:p>
+              <a:pPr algn="ctr"/>
+            </a:p>
+          </p:txBody>
+        </p:sp>
+        <p:sp>
+          <p:nvSpPr>
+            <p:cNvPr id="18" name="Wave 17"/>
+            <p:cNvSpPr/>
+            <p:nvPr/>
+          </p:nvSpPr>
+          <p:spPr>
+            <a:xfrm rot="5400000">
+              <a:off x="8264842" y="9283065"/>
+              <a:ext cx="97155" cy="388620"/>
+            </a:xfrm>
+            <a:prstGeom prst="wave">
+              <a:avLst/>
+            </a:prstGeom>
+            <a:solidFill>
+              <a:srgbClr val="D8D2C4"/>
+            </a:solidFill>
+            <a:ln>
+              <a:noFill/>
+            </a:ln>
+            <a:effectLst/>
+          </p:spPr>
+          <p:style>
+            <a:lnRef idx="1">
+              <a:schemeClr val="accent1"/>
+            </a:lnRef>
+            <a:fillRef idx="3">
+              <a:schemeClr val="accent1"/>
+            </a:fillRef>
+            <a:effectRef idx="2">
+              <a:schemeClr val="accent1"/>
+            </a:effectRef>
+            <a:fontRef idx="minor">
+              <a:schemeClr val="lt1"/>
+            </a:fontRef>
+          </p:style>
+          <p:txBody>
+            <a:bodyPr rtlCol="0" anchor="ctr"/>
+            <a:lstStyle/>
+            <a:p>
+              <a:pPr algn="ctr"/>
+            </a:p>
+          </p:txBody>
+        </p:sp>
+        <p:sp>
+          <p:nvSpPr>
+            <p:cNvPr id="19" name="Wave 18"/>
+            <p:cNvSpPr/>
+            <p:nvPr/>
+          </p:nvSpPr>
+          <p:spPr>
+            <a:xfrm rot="5400000">
+              <a:off x="8523922" y="9283065"/>
+              <a:ext cx="97155" cy="388620"/>
+            </a:xfrm>
+            <a:prstGeom prst="wave">
+              <a:avLst/>
+            </a:prstGeom>
+            <a:solidFill>
+              <a:srgbClr val="D8D2C4"/>
+            </a:solidFill>
+            <a:ln>
+              <a:noFill/>
+            </a:ln>
+            <a:effectLst/>
+          </p:spPr>
+          <p:style>
+            <a:lnRef idx="1">
+              <a:schemeClr val="accent1"/>
+            </a:lnRef>
+            <a:fillRef idx="3">
+              <a:schemeClr val="accent1"/>
+            </a:fillRef>
+            <a:effectRef idx="2">
+              <a:schemeClr val="accent1"/>
+            </a:effectRef>
+            <a:fontRef idx="minor">
+              <a:schemeClr val="lt1"/>
+            </a:fontRef>
+          </p:style>
+          <p:txBody>
+            <a:bodyPr rtlCol="0" anchor="ctr"/>
+            <a:lstStyle/>
+            <a:p>
+              <a:pPr algn="ctr"/>
+            </a:p>
+          </p:txBody>
+        </p:sp>
+        <p:sp>
+          <p:nvSpPr>
+            <p:cNvPr id="20" name="Wave 19"/>
+            <p:cNvSpPr/>
+            <p:nvPr/>
+          </p:nvSpPr>
+          <p:spPr>
+            <a:xfrm rot="5400000">
+              <a:off x="8783002" y="9283065"/>
+              <a:ext cx="97155" cy="388620"/>
+            </a:xfrm>
+            <a:prstGeom prst="wave">
+              <a:avLst/>
+            </a:prstGeom>
+            <a:solidFill>
+              <a:srgbClr val="D8D2C4"/>
+            </a:solidFill>
+            <a:ln>
+              <a:noFill/>
+            </a:ln>
+            <a:effectLst/>
+          </p:spPr>
+          <p:style>
+            <a:lnRef idx="1">
+              <a:schemeClr val="accent1"/>
+            </a:lnRef>
+            <a:fillRef idx="3">
+              <a:schemeClr val="accent1"/>
+            </a:fillRef>
+            <a:effectRef idx="2">
+              <a:schemeClr val="accent1"/>
+            </a:effectRef>
+            <a:fontRef idx="minor">
+              <a:schemeClr val="lt1"/>
+            </a:fontRef>
+          </p:style>
+          <p:txBody>
+            <a:bodyPr rtlCol="0" anchor="ctr"/>
+            <a:lstStyle/>
+            <a:p>
+              <a:pPr algn="ctr"/>
+            </a:p>
+          </p:txBody>
+        </p:sp>
+      </p:grpSp>
+      <p:sp>
+        <p:nvSpPr>
+          <p:cNvPr id="21" name="Rounded Rectangle 20"/>
           <p:cNvSpPr/>
           <p:nvPr/>
         </p:nvSpPr>
@@ -3727,7 +4410,7 @@
       </p:sp>
       <p:sp>
         <p:nvSpPr>
-          <p:cNvPr id="6" name="TextBox 5"/>
+          <p:cNvPr id="22" name="TextBox 21"/>
           <p:cNvSpPr txBox="1"/>
           <p:nvPr/>
         </p:nvSpPr>
@@ -3766,14 +4449,14 @@
       </p:sp>
       <p:sp>
         <p:nvSpPr>
-          <p:cNvPr id="7" name="TextBox 6"/>
+          <p:cNvPr id="23" name="TextBox 22"/>
           <p:cNvSpPr txBox="1"/>
           <p:nvPr/>
         </p:nvSpPr>
         <p:spPr>
           <a:xfrm>
             <a:off x="762000" y="9620250"/>
-            <a:ext cx="8572500" cy="857250"/>
+            <a:ext cx="7620000" cy="857250"/>
           </a:xfrm>
           <a:prstGeom prst="rect">
             <a:avLst/>
@@ -3805,14 +4488,14 @@
       </p:sp>
       <p:sp>
         <p:nvSpPr>
-          <p:cNvPr id="8" name="TextBox 7"/>
+          <p:cNvPr id="24" name="TextBox 23"/>
           <p:cNvSpPr txBox="1"/>
           <p:nvPr/>
         </p:nvSpPr>
         <p:spPr>
           <a:xfrm>
             <a:off x="762000" y="10525125"/>
-            <a:ext cx="7620000" cy="476250"/>
+            <a:ext cx="7239000" cy="476250"/>
           </a:xfrm>
           <a:prstGeom prst="rect">
             <a:avLst/>
@@ -3844,14 +4527,14 @@
       </p:sp>
       <p:pic>
         <p:nvPicPr>
-          <p:cNvPr id="9" name="Picture 8" descr="foundation-logo-white.png"/>
+          <p:cNvPr id="25" name="Picture 24" descr="foundation-logo-white.png"/>
           <p:cNvPicPr>
             <a:picLocks noChangeAspect="1"/>
           </p:cNvPicPr>
           <p:nvPr/>
         </p:nvPicPr>
         <p:blipFill>
-          <a:blip r:embed="rId5"/>
+          <a:blip r:embed="rId6"/>
           <a:stretch>
             <a:fillRect/>
           </a:stretch>
@@ -3880,7 +4563,7 @@
     <p:bg>
       <p:bgPr>
         <a:solidFill>
-          <a:srgbClr val="22371F"/>
+          <a:srgbClr val="F4F1EA"/>
         </a:solidFill>
         <a:effectLst/>
       </p:bgPr>
@@ -3892,16 +4575,90 @@
         <p:nvPr/>
       </p:nvGrpSpPr>
       <p:grpSpPr/>
-      <p:sp>
-        <p:nvSpPr>
-          <p:cNvPr id="2" name="Rectangle 1"/>
-          <p:cNvSpPr/>
+      <p:pic>
+        <p:nvPicPr>
+          <p:cNvPr id="2" name="Picture 1" descr="paper-grain-cream.jpg"/>
+          <p:cNvPicPr>
+            <a:picLocks noChangeAspect="1"/>
+          </p:cNvPicPr>
           <p:nvPr/>
-        </p:nvSpPr>
+        </p:nvPicPr>
+        <p:blipFill>
+          <a:blip r:embed="rId3"/>
+          <a:stretch>
+            <a:fillRect/>
+          </a:stretch>
+        </p:blipFill>
         <p:spPr>
           <a:xfrm>
             <a:off x="0" y="0"/>
-            <a:ext cx="10287000" cy="8362950"/>
+            <a:ext cx="10287000" cy="12858750"/>
+          </a:xfrm>
+          <a:prstGeom prst="rect">
+            <a:avLst/>
+          </a:prstGeom>
+        </p:spPr>
+      </p:pic>
+      <p:sp>
+        <p:nvSpPr>
+          <p:cNvPr id="3" name="Rectangle 2"/>
+          <p:cNvSpPr/>
+          <p:nvPr/>
+        </p:nvSpPr>
+        <p:spPr>
+          <a:xfrm rot="21480000">
+            <a:off x="476250" y="381000"/>
+            <a:ext cx="9334500" cy="7810500"/>
+          </a:xfrm>
+          <a:prstGeom prst="rect">
+            <a:avLst/>
+          </a:prstGeom>
+          <a:solidFill>
+            <a:srgbClr val="FFFDF7"/>
+          </a:solidFill>
+          <a:ln>
+            <a:noFill/>
+          </a:ln>
+          <a:effectLst>
+            <a:outerShdw blurRad="228600" dist="76200" dir="5400000" algn="t" rotWithShape="0">
+              <a:srgbClr val="000000">
+                <a:alpha val="30000"/>
+              </a:srgbClr>
+            </a:outerShdw>
+          </a:effectLst>
+        </p:spPr>
+        <p:style>
+          <a:lnRef idx="1">
+            <a:schemeClr val="accent1"/>
+          </a:lnRef>
+          <a:fillRef idx="3">
+            <a:schemeClr val="accent1"/>
+          </a:fillRef>
+          <a:effectRef idx="2">
+            <a:schemeClr val="accent1"/>
+          </a:effectRef>
+          <a:fontRef idx="minor">
+            <a:schemeClr val="lt1"/>
+          </a:fontRef>
+        </p:style>
+        <p:txBody>
+          <a:bodyPr rtlCol="0" anchor="ctr"/>
+          <a:lstStyle/>
+          <a:p>
+            <a:pPr algn="ctr"/>
+          </a:p>
+        </p:txBody>
+      </p:sp>
+      <p:sp>
+        <p:nvSpPr>
+          <p:cNvPr id="4" name="Rectangle 3"/>
+          <p:cNvSpPr/>
+          <p:nvPr/>
+        </p:nvSpPr>
+        <p:spPr>
+          <a:xfrm rot="21480000">
+            <a:off x="666750" y="571500"/>
+            <a:ext cx="8953500" cy="7429500"/>
           </a:xfrm>
           <a:prstGeom prst="rect">
             <a:avLst/>
@@ -3943,22 +4700,22 @@
       </p:sp>
       <p:pic>
         <p:nvPicPr>
-          <p:cNvPr id="3" name="Picture 2" descr="foundation-logo-color.png"/>
+          <p:cNvPr id="5" name="Picture 4" descr="foundation-logo-color.png"/>
           <p:cNvPicPr>
             <a:picLocks noChangeAspect="1"/>
           </p:cNvPicPr>
           <p:nvPr/>
         </p:nvPicPr>
         <p:blipFill>
-          <a:blip r:embed="rId3"/>
+          <a:blip r:embed="rId4"/>
           <a:stretch>
             <a:fillRect/>
           </a:stretch>
         </p:blipFill>
         <p:spPr>
           <a:xfrm>
-            <a:off x="2843688" y="2113811"/>
-            <a:ext cx="4599622" cy="4135326"/>
+            <a:off x="3143250" y="2476500"/>
+            <a:ext cx="4000500" cy="3596681"/>
           </a:xfrm>
           <a:prstGeom prst="rect">
             <a:avLst/>
@@ -3967,7 +4724,99 @@
       </p:pic>
       <p:sp>
         <p:nvSpPr>
-          <p:cNvPr id="4" name="Rectangle 3"/>
+          <p:cNvPr id="6" name="Rectangle 5"/>
+          <p:cNvSpPr/>
+          <p:nvPr/>
+        </p:nvSpPr>
+        <p:spPr>
+          <a:xfrm rot="19800000">
+            <a:off x="285750" y="323850"/>
+            <a:ext cx="1714500" cy="495300"/>
+          </a:xfrm>
+          <a:prstGeom prst="rect">
+            <a:avLst/>
+          </a:prstGeom>
+          <a:solidFill>
+            <a:srgbClr val="DBE6A7">
+              <a:alpha val="70000"/>
+            </a:srgbClr>
+          </a:solidFill>
+          <a:ln>
+            <a:noFill/>
+          </a:ln>
+          <a:effectLst/>
+        </p:spPr>
+        <p:style>
+          <a:lnRef idx="1">
+            <a:schemeClr val="accent1"/>
+          </a:lnRef>
+          <a:fillRef idx="3">
+            <a:schemeClr val="accent1"/>
+          </a:fillRef>
+          <a:effectRef idx="2">
+            <a:schemeClr val="accent1"/>
+          </a:effectRef>
+          <a:fontRef idx="minor">
+            <a:schemeClr val="lt1"/>
+          </a:fontRef>
+        </p:style>
+        <p:txBody>
+          <a:bodyPr rtlCol="0" anchor="ctr"/>
+          <a:lstStyle/>
+          <a:p>
+            <a:pPr algn="ctr"/>
+          </a:p>
+        </p:txBody>
+      </p:sp>
+      <p:sp>
+        <p:nvSpPr>
+          <p:cNvPr id="7" name="Rectangle 6"/>
+          <p:cNvSpPr/>
+          <p:nvPr/>
+        </p:nvSpPr>
+        <p:spPr>
+          <a:xfrm rot="1800000">
+            <a:off x="8286750" y="323850"/>
+            <a:ext cx="1714500" cy="495300"/>
+          </a:xfrm>
+          <a:prstGeom prst="rect">
+            <a:avLst/>
+          </a:prstGeom>
+          <a:solidFill>
+            <a:srgbClr val="DBE6A7">
+              <a:alpha val="70000"/>
+            </a:srgbClr>
+          </a:solidFill>
+          <a:ln>
+            <a:noFill/>
+          </a:ln>
+          <a:effectLst/>
+        </p:spPr>
+        <p:style>
+          <a:lnRef idx="1">
+            <a:schemeClr val="accent1"/>
+          </a:lnRef>
+          <a:fillRef idx="3">
+            <a:schemeClr val="accent1"/>
+          </a:fillRef>
+          <a:effectRef idx="2">
+            <a:schemeClr val="accent1"/>
+          </a:effectRef>
+          <a:fontRef idx="minor">
+            <a:schemeClr val="lt1"/>
+          </a:fontRef>
+        </p:style>
+        <p:txBody>
+          <a:bodyPr rtlCol="0" anchor="ctr"/>
+          <a:lstStyle/>
+          <a:p>
+            <a:pPr algn="ctr"/>
+          </a:p>
+        </p:txBody>
+      </p:sp>
+      <p:sp>
+        <p:nvSpPr>
+          <p:cNvPr id="8" name="Rectangle 7"/>
           <p:cNvSpPr/>
           <p:nvPr/>
         </p:nvSpPr>
@@ -4011,21 +4860,21 @@
       </p:sp>
       <p:pic>
         <p:nvPicPr>
-          <p:cNvPr id="5" name="Picture 4" descr="trim-dried-flowers-2-1.png"/>
+          <p:cNvPr id="9" name="Picture 8" descr="trim-dried-flowers-2-1.png"/>
           <p:cNvPicPr>
             <a:picLocks noChangeAspect="1"/>
           </p:cNvPicPr>
           <p:nvPr/>
         </p:nvPicPr>
         <p:blipFill>
-          <a:blip r:embed="rId4"/>
+          <a:blip r:embed="rId5"/>
           <a:stretch>
             <a:fillRect/>
           </a:stretch>
         </p:blipFill>
         <p:spPr>
           <a:xfrm rot="19920000">
-            <a:off x="0" y="-315177"/>
+            <a:off x="0" y="-124677"/>
             <a:ext cx="1809750" cy="2725855"/>
           </a:xfrm>
           <a:prstGeom prst="rect">
@@ -4033,9 +4882,436 @@
           </a:prstGeom>
         </p:spPr>
       </p:pic>
-      <p:sp>
-        <p:nvSpPr>
-          <p:cNvPr id="6" name="Rounded Rectangle 5"/>
+      <p:grpSp>
+        <p:nvGrpSpPr>
+          <p:cNvPr id="10" name="Group 9"/>
+          <p:cNvGrpSpPr/>
+          <p:nvPr/>
+        </p:nvGrpSpPr>
+        <p:grpSpPr>
+          <a:xfrm rot="480000">
+            <a:off x="0" y="0"/>
+            <a:ext cx="9307829" cy="10887075"/>
+            <a:chOff x="0" y="0"/>
+            <a:chExt cx="9307829" cy="10887075"/>
+          </a:xfrm>
+        </p:grpSpPr>
+        <p:sp>
+          <p:nvSpPr>
+            <p:cNvPr id="11" name="Rectangle 10"/>
+            <p:cNvSpPr/>
+            <p:nvPr/>
+          </p:nvSpPr>
+          <p:spPr>
+            <a:xfrm>
+              <a:off x="8734425" y="9525000"/>
+              <a:ext cx="57150" cy="1362075"/>
+            </a:xfrm>
+            <a:prstGeom prst="rect">
+              <a:avLst/>
+            </a:prstGeom>
+            <a:solidFill>
+              <a:srgbClr val="7FA05A"/>
+            </a:solidFill>
+            <a:ln>
+              <a:noFill/>
+            </a:ln>
+            <a:effectLst/>
+          </p:spPr>
+          <p:style>
+            <a:lnRef idx="1">
+              <a:schemeClr val="accent1"/>
+            </a:lnRef>
+            <a:fillRef idx="3">
+              <a:schemeClr val="accent1"/>
+            </a:fillRef>
+            <a:effectRef idx="2">
+              <a:schemeClr val="accent1"/>
+            </a:effectRef>
+            <a:fontRef idx="minor">
+              <a:schemeClr val="lt1"/>
+            </a:fontRef>
+          </p:style>
+          <p:txBody>
+            <a:bodyPr rtlCol="0" anchor="ctr"/>
+            <a:lstStyle/>
+            <a:p>
+              <a:pPr algn="ctr"/>
+            </a:p>
+          </p:txBody>
+        </p:sp>
+        <p:sp>
+          <p:nvSpPr>
+            <p:cNvPr id="12" name="Oval 11"/>
+            <p:cNvSpPr/>
+            <p:nvPr/>
+          </p:nvSpPr>
+          <p:spPr>
+            <a:xfrm rot="19800000">
+              <a:off x="8782050" y="10206037"/>
+              <a:ext cx="471487" cy="209550"/>
+            </a:xfrm>
+            <a:prstGeom prst="ellipse">
+              <a:avLst/>
+            </a:prstGeom>
+            <a:solidFill>
+              <a:srgbClr val="59A66C"/>
+            </a:solidFill>
+            <a:ln w="57150">
+              <a:solidFill>
+                <a:srgbClr val="FFFFFF"/>
+              </a:solidFill>
+            </a:ln>
+            <a:effectLst/>
+          </p:spPr>
+          <p:style>
+            <a:lnRef idx="1">
+              <a:schemeClr val="accent1"/>
+            </a:lnRef>
+            <a:fillRef idx="3">
+              <a:schemeClr val="accent1"/>
+            </a:fillRef>
+            <a:effectRef idx="2">
+              <a:schemeClr val="accent1"/>
+            </a:effectRef>
+            <a:fontRef idx="minor">
+              <a:schemeClr val="lt1"/>
+            </a:fontRef>
+          </p:style>
+          <p:txBody>
+            <a:bodyPr rtlCol="0" anchor="ctr"/>
+            <a:lstStyle/>
+            <a:p>
+              <a:pPr algn="ctr"/>
+            </a:p>
+          </p:txBody>
+        </p:sp>
+        <p:sp>
+          <p:nvSpPr>
+            <p:cNvPr id="13" name="Oval 12"/>
+            <p:cNvSpPr/>
+            <p:nvPr/>
+          </p:nvSpPr>
+          <p:spPr>
+            <a:xfrm>
+              <a:off x="8867775" y="9378315"/>
+              <a:ext cx="440054" cy="293370"/>
+            </a:xfrm>
+            <a:prstGeom prst="ellipse">
+              <a:avLst/>
+            </a:prstGeom>
+            <a:solidFill>
+              <a:srgbClr val="F2CF5B"/>
+            </a:solidFill>
+            <a:ln w="38100">
+              <a:solidFill>
+                <a:srgbClr val="FFFFFF"/>
+              </a:solidFill>
+            </a:ln>
+            <a:effectLst/>
+          </p:spPr>
+          <p:style>
+            <a:lnRef idx="1">
+              <a:schemeClr val="accent1"/>
+            </a:lnRef>
+            <a:fillRef idx="3">
+              <a:schemeClr val="accent1"/>
+            </a:fillRef>
+            <a:effectRef idx="2">
+              <a:schemeClr val="accent1"/>
+            </a:effectRef>
+            <a:fontRef idx="minor">
+              <a:schemeClr val="lt1"/>
+            </a:fontRef>
+          </p:style>
+          <p:txBody>
+            <a:bodyPr rtlCol="0" anchor="ctr"/>
+            <a:lstStyle/>
+            <a:p>
+              <a:pPr algn="ctr"/>
+            </a:p>
+          </p:txBody>
+        </p:sp>
+        <p:sp>
+          <p:nvSpPr>
+            <p:cNvPr id="14" name="Oval 13"/>
+            <p:cNvSpPr/>
+            <p:nvPr/>
+          </p:nvSpPr>
+          <p:spPr>
+            <a:xfrm rot="3600000">
+              <a:off x="8705373" y="9659602"/>
+              <a:ext cx="440054" cy="293370"/>
+            </a:xfrm>
+            <a:prstGeom prst="ellipse">
+              <a:avLst/>
+            </a:prstGeom>
+            <a:solidFill>
+              <a:srgbClr val="F2CF5B"/>
+            </a:solidFill>
+            <a:ln w="38100">
+              <a:solidFill>
+                <a:srgbClr val="FFFFFF"/>
+              </a:solidFill>
+            </a:ln>
+            <a:effectLst/>
+          </p:spPr>
+          <p:style>
+            <a:lnRef idx="1">
+              <a:schemeClr val="accent1"/>
+            </a:lnRef>
+            <a:fillRef idx="3">
+              <a:schemeClr val="accent1"/>
+            </a:fillRef>
+            <a:effectRef idx="2">
+              <a:schemeClr val="accent1"/>
+            </a:effectRef>
+            <a:fontRef idx="minor">
+              <a:schemeClr val="lt1"/>
+            </a:fontRef>
+          </p:style>
+          <p:txBody>
+            <a:bodyPr rtlCol="0" anchor="ctr"/>
+            <a:lstStyle/>
+            <a:p>
+              <a:pPr algn="ctr"/>
+            </a:p>
+          </p:txBody>
+        </p:sp>
+        <p:sp>
+          <p:nvSpPr>
+            <p:cNvPr id="15" name="Oval 14"/>
+            <p:cNvSpPr/>
+            <p:nvPr/>
+          </p:nvSpPr>
+          <p:spPr>
+            <a:xfrm rot="7200000">
+              <a:off x="8380571" y="9659602"/>
+              <a:ext cx="440054" cy="293370"/>
+            </a:xfrm>
+            <a:prstGeom prst="ellipse">
+              <a:avLst/>
+            </a:prstGeom>
+            <a:solidFill>
+              <a:srgbClr val="F2CF5B"/>
+            </a:solidFill>
+            <a:ln w="38100">
+              <a:solidFill>
+                <a:srgbClr val="FFFFFF"/>
+              </a:solidFill>
+            </a:ln>
+            <a:effectLst/>
+          </p:spPr>
+          <p:style>
+            <a:lnRef idx="1">
+              <a:schemeClr val="accent1"/>
+            </a:lnRef>
+            <a:fillRef idx="3">
+              <a:schemeClr val="accent1"/>
+            </a:fillRef>
+            <a:effectRef idx="2">
+              <a:schemeClr val="accent1"/>
+            </a:effectRef>
+            <a:fontRef idx="minor">
+              <a:schemeClr val="lt1"/>
+            </a:fontRef>
+          </p:style>
+          <p:txBody>
+            <a:bodyPr rtlCol="0" anchor="ctr"/>
+            <a:lstStyle/>
+            <a:p>
+              <a:pPr algn="ctr"/>
+            </a:p>
+          </p:txBody>
+        </p:sp>
+        <p:sp>
+          <p:nvSpPr>
+            <p:cNvPr id="16" name="Oval 15"/>
+            <p:cNvSpPr/>
+            <p:nvPr/>
+          </p:nvSpPr>
+          <p:spPr>
+            <a:xfrm rot="10800000">
+              <a:off x="8218170" y="9378315"/>
+              <a:ext cx="440054" cy="293370"/>
+            </a:xfrm>
+            <a:prstGeom prst="ellipse">
+              <a:avLst/>
+            </a:prstGeom>
+            <a:solidFill>
+              <a:srgbClr val="F2CF5B"/>
+            </a:solidFill>
+            <a:ln w="38100">
+              <a:solidFill>
+                <a:srgbClr val="FFFFFF"/>
+              </a:solidFill>
+            </a:ln>
+            <a:effectLst/>
+          </p:spPr>
+          <p:style>
+            <a:lnRef idx="1">
+              <a:schemeClr val="accent1"/>
+            </a:lnRef>
+            <a:fillRef idx="3">
+              <a:schemeClr val="accent1"/>
+            </a:fillRef>
+            <a:effectRef idx="2">
+              <a:schemeClr val="accent1"/>
+            </a:effectRef>
+            <a:fontRef idx="minor">
+              <a:schemeClr val="lt1"/>
+            </a:fontRef>
+          </p:style>
+          <p:txBody>
+            <a:bodyPr rtlCol="0" anchor="ctr"/>
+            <a:lstStyle/>
+            <a:p>
+              <a:pPr algn="ctr"/>
+            </a:p>
+          </p:txBody>
+        </p:sp>
+        <p:sp>
+          <p:nvSpPr>
+            <p:cNvPr id="17" name="Oval 16"/>
+            <p:cNvSpPr/>
+            <p:nvPr/>
+          </p:nvSpPr>
+          <p:spPr>
+            <a:xfrm rot="14400000">
+              <a:off x="8380571" y="9097027"/>
+              <a:ext cx="440054" cy="293370"/>
+            </a:xfrm>
+            <a:prstGeom prst="ellipse">
+              <a:avLst/>
+            </a:prstGeom>
+            <a:solidFill>
+              <a:srgbClr val="F2CF5B"/>
+            </a:solidFill>
+            <a:ln w="38100">
+              <a:solidFill>
+                <a:srgbClr val="FFFFFF"/>
+              </a:solidFill>
+            </a:ln>
+            <a:effectLst/>
+          </p:spPr>
+          <p:style>
+            <a:lnRef idx="1">
+              <a:schemeClr val="accent1"/>
+            </a:lnRef>
+            <a:fillRef idx="3">
+              <a:schemeClr val="accent1"/>
+            </a:fillRef>
+            <a:effectRef idx="2">
+              <a:schemeClr val="accent1"/>
+            </a:effectRef>
+            <a:fontRef idx="minor">
+              <a:schemeClr val="lt1"/>
+            </a:fontRef>
+          </p:style>
+          <p:txBody>
+            <a:bodyPr rtlCol="0" anchor="ctr"/>
+            <a:lstStyle/>
+            <a:p>
+              <a:pPr algn="ctr"/>
+            </a:p>
+          </p:txBody>
+        </p:sp>
+        <p:sp>
+          <p:nvSpPr>
+            <p:cNvPr id="18" name="Oval 17"/>
+            <p:cNvSpPr/>
+            <p:nvPr/>
+          </p:nvSpPr>
+          <p:spPr>
+            <a:xfrm rot="18000000">
+              <a:off x="8705373" y="9097027"/>
+              <a:ext cx="440054" cy="293370"/>
+            </a:xfrm>
+            <a:prstGeom prst="ellipse">
+              <a:avLst/>
+            </a:prstGeom>
+            <a:solidFill>
+              <a:srgbClr val="F2CF5B"/>
+            </a:solidFill>
+            <a:ln w="38100">
+              <a:solidFill>
+                <a:srgbClr val="FFFFFF"/>
+              </a:solidFill>
+            </a:ln>
+            <a:effectLst/>
+          </p:spPr>
+          <p:style>
+            <a:lnRef idx="1">
+              <a:schemeClr val="accent1"/>
+            </a:lnRef>
+            <a:fillRef idx="3">
+              <a:schemeClr val="accent1"/>
+            </a:fillRef>
+            <a:effectRef idx="2">
+              <a:schemeClr val="accent1"/>
+            </a:effectRef>
+            <a:fontRef idx="minor">
+              <a:schemeClr val="lt1"/>
+            </a:fontRef>
+          </p:style>
+          <p:txBody>
+            <a:bodyPr rtlCol="0" anchor="ctr"/>
+            <a:lstStyle/>
+            <a:p>
+              <a:pPr algn="ctr"/>
+            </a:p>
+          </p:txBody>
+        </p:sp>
+        <p:sp>
+          <p:nvSpPr>
+            <p:cNvPr id="19" name="Oval 18"/>
+            <p:cNvSpPr/>
+            <p:nvPr/>
+          </p:nvSpPr>
+          <p:spPr>
+            <a:xfrm>
+              <a:off x="8563927" y="9325927"/>
+              <a:ext cx="398145" cy="398145"/>
+            </a:xfrm>
+            <a:prstGeom prst="ellipse">
+              <a:avLst/>
+            </a:prstGeom>
+            <a:solidFill>
+              <a:srgbClr val="8C6A4E"/>
+            </a:solidFill>
+            <a:ln w="38100">
+              <a:solidFill>
+                <a:srgbClr val="FFFFFF"/>
+              </a:solidFill>
+            </a:ln>
+            <a:effectLst/>
+          </p:spPr>
+          <p:style>
+            <a:lnRef idx="1">
+              <a:schemeClr val="accent1"/>
+            </a:lnRef>
+            <a:fillRef idx="3">
+              <a:schemeClr val="accent1"/>
+            </a:fillRef>
+            <a:effectRef idx="2">
+              <a:schemeClr val="accent1"/>
+            </a:effectRef>
+            <a:fontRef idx="minor">
+              <a:schemeClr val="lt1"/>
+            </a:fontRef>
+          </p:style>
+          <p:txBody>
+            <a:bodyPr rtlCol="0" anchor="ctr"/>
+            <a:lstStyle/>
+            <a:p>
+              <a:pPr algn="ctr"/>
+            </a:p>
+          </p:txBody>
+        </p:sp>
+      </p:grpSp>
+      <p:sp>
+        <p:nvSpPr>
+          <p:cNvPr id="20" name="Rounded Rectangle 19"/>
           <p:cNvSpPr/>
           <p:nvPr/>
         </p:nvSpPr>
@@ -4081,7 +5357,7 @@
       </p:sp>
       <p:sp>
         <p:nvSpPr>
-          <p:cNvPr id="7" name="TextBox 6"/>
+          <p:cNvPr id="21" name="TextBox 20"/>
           <p:cNvSpPr txBox="1"/>
           <p:nvPr/>
         </p:nvSpPr>
@@ -4120,14 +5396,14 @@
       </p:sp>
       <p:sp>
         <p:nvSpPr>
-          <p:cNvPr id="8" name="TextBox 7"/>
+          <p:cNvPr id="22" name="TextBox 21"/>
           <p:cNvSpPr txBox="1"/>
           <p:nvPr/>
         </p:nvSpPr>
         <p:spPr>
           <a:xfrm>
             <a:off x="762000" y="9620250"/>
-            <a:ext cx="8572500" cy="857250"/>
+            <a:ext cx="7620000" cy="857250"/>
           </a:xfrm>
           <a:prstGeom prst="rect">
             <a:avLst/>
@@ -4159,14 +5435,14 @@
       </p:sp>
       <p:sp>
         <p:nvSpPr>
-          <p:cNvPr id="9" name="TextBox 8"/>
+          <p:cNvPr id="23" name="TextBox 22"/>
           <p:cNvSpPr txBox="1"/>
           <p:nvPr/>
         </p:nvSpPr>
         <p:spPr>
           <a:xfrm>
             <a:off x="762000" y="10525125"/>
-            <a:ext cx="7620000" cy="476250"/>
+            <a:ext cx="7239000" cy="476250"/>
           </a:xfrm>
           <a:prstGeom prst="rect">
             <a:avLst/>
@@ -4198,14 +5474,14 @@
       </p:sp>
       <p:pic>
         <p:nvPicPr>
-          <p:cNvPr id="10" name="Picture 9" descr="foundation-logo-white.png"/>
+          <p:cNvPr id="24" name="Picture 23" descr="foundation-logo-white.png"/>
           <p:cNvPicPr>
             <a:picLocks noChangeAspect="1"/>
           </p:cNvPicPr>
           <p:nvPr/>
         </p:nvPicPr>
         <p:blipFill>
-          <a:blip r:embed="rId5"/>
+          <a:blip r:embed="rId6"/>
           <a:stretch>
             <a:fillRect/>
           </a:stretch>
